--- a/assets/powerpoints/module-vetements/A2-le-feminin-qu-on-entend.pptx
+++ b/assets/powerpoints/module-vetements/A2-le-feminin-qu-on-entend.pptx
@@ -10707,7 +10707,43 @@
                 </a:solidFill>
                 <a:latin typeface="Verdana"/>
               </a:rPr>
-              <a:t>À l'&lt;b&gt;écoute&lt;/b&gt; : si vous entendez la consonne, l'objet est féminin — vous savez qu'on parle d'une veste et non d'un manteau, même si vous avez manqué le nom. À l'&lt;b&gt;écrit&lt;/b&gt; : dites le mot au féminin dans votre tête, et la lettre à écrire apparaît.</a:t>
+              <a:t>À l'</a:t>
+            </a:r>
+            <a:r>
+              <a:rPr sz="2000" b="1" i="0">
+                <a:solidFill>
+                  <a:srgbClr val="4B4F52"/>
+                </a:solidFill>
+                <a:latin typeface="Verdana"/>
+              </a:rPr>
+              <a:t>écoute</a:t>
+            </a:r>
+            <a:r>
+              <a:rPr sz="2000" b="0" i="0">
+                <a:solidFill>
+                  <a:srgbClr val="4B4F52"/>
+                </a:solidFill>
+                <a:latin typeface="Verdana"/>
+              </a:rPr>
+              <a:t> : si vous entendez la consonne, l'objet est féminin — vous savez qu'on parle d'une veste et non d'un manteau, même si vous avez manqué le nom. À l'</a:t>
+            </a:r>
+            <a:r>
+              <a:rPr sz="2000" b="1" i="0">
+                <a:solidFill>
+                  <a:srgbClr val="4B4F52"/>
+                </a:solidFill>
+                <a:latin typeface="Verdana"/>
+              </a:rPr>
+              <a:t>écrit</a:t>
+            </a:r>
+            <a:r>
+              <a:rPr sz="2000" b="0" i="0">
+                <a:solidFill>
+                  <a:srgbClr val="4B4F52"/>
+                </a:solidFill>
+                <a:latin typeface="Verdana"/>
+              </a:rPr>
+              <a:t> : dites le mot au féminin dans votre tête, et la lettre à écrire apparaît.</a:t>
             </a:r>
           </a:p>
         </p:txBody>
